--- a/presentation/practicum-award-2026-case-team.pptx
+++ b/presentation/practicum-award-2026-case-team.pptx
@@ -8580,7 +8580,28 @@
                 <a:latin typeface="YS Text"/>
                 <a:ea typeface="YS Text"/>
               </a:rPr>
-              <a:t>Частотность Core Job: 2-6 раз в год на одного фаундера (extract-jobs-from-reviews).</a:t>
+              <a:t>Частотность работы: 2-6 раз в год — </a:t>
+            </a:r>
+            <a:r>
+              <a:rPr sz="1000" b="0" i="1" u="sng">
+                <a:solidFill>
+                  <a:srgbClr val="0B57D0"/>
+                </a:solidFill>
+                <a:latin typeface="YS Text"/>
+                <a:ea typeface="YS Text"/>
+                <a:hlinkClick r:id="rId2"/>
+              </a:rPr>
+              <a:t>граф работ из отзывов клиентов на конкурентов</a:t>
+            </a:r>
+            <a:r>
+              <a:rPr sz="1000" b="0" i="1">
+                <a:solidFill>
+                  <a:srgbClr val="666666"/>
+                </a:solidFill>
+                <a:latin typeface="YS Text"/>
+                <a:ea typeface="YS Text"/>
+              </a:rPr>
+              <a:t>.</a:t>
             </a:r>
           </a:p>
         </p:txBody>
@@ -10596,7 +10617,28 @@
                 <a:latin typeface="YS Text"/>
                 <a:ea typeface="YS Text"/>
               </a:rPr>
-              <a:t>Полная матрица 8 критериев × 9 конкурентов — по запросу к автору; будет опубликована в репозитории после конкурса.</a:t>
+              <a:t>Полная матрица 8 критериев × 9 конкурентов — в </a:t>
+            </a:r>
+            <a:r>
+              <a:rPr sz="1000" b="0" i="1" u="sng">
+                <a:solidFill>
+                  <a:srgbClr val="0B57D0"/>
+                </a:solidFill>
+                <a:latin typeface="YS Text"/>
+                <a:ea typeface="YS Text"/>
+                <a:hlinkClick r:id="rId2"/>
+              </a:rPr>
+              <a:t>открытом репозитории</a:t>
+            </a:r>
+            <a:r>
+              <a:rPr sz="1000" b="0" i="1">
+                <a:solidFill>
+                  <a:srgbClr val="666666"/>
+                </a:solidFill>
+                <a:latin typeface="YS Text"/>
+                <a:ea typeface="YS Text"/>
+              </a:rPr>
+              <a:t>.</a:t>
             </a:r>
           </a:p>
         </p:txBody>
@@ -13344,7 +13386,28 @@
                 <a:latin typeface="YS Text"/>
                 <a:ea typeface="YS Text"/>
               </a:rPr>
-              <a:t>SENSITIVITY ±20% по 3 параметрам — устойчиво 84-98% экономии vs in-house. Все источники цифр (Anthropic Pricing, ЦБ РФ, dreamjob.ru, fless.pro) — Приложение A0.</a:t>
+              <a:t>SENSITIVITY ±20% — устойчиво 84-98% vs in-house. Источники — A0. </a:t>
+            </a:r>
+            <a:r>
+              <a:rPr sz="1100" b="0" i="0" u="sng">
+                <a:solidFill>
+                  <a:srgbClr val="0B57D0"/>
+                </a:solidFill>
+                <a:latin typeface="YS Text"/>
+                <a:ea typeface="YS Text"/>
+                <a:hlinkClick r:id="rId2"/>
+              </a:rPr>
+              <a:t>Полная финмодель</a:t>
+            </a:r>
+            <a:r>
+              <a:rPr sz="1100" b="0" i="0">
+                <a:solidFill>
+                  <a:srgbClr val="000000"/>
+                </a:solidFill>
+                <a:latin typeface="YS Text"/>
+                <a:ea typeface="YS Text"/>
+              </a:rPr>
+              <a:t> в открытом репозитории.</a:t>
             </a:r>
           </a:p>
         </p:txBody>
@@ -15000,7 +15063,28 @@
                 <a:latin typeface="YS Text"/>
                 <a:ea typeface="YS Text"/>
               </a:rPr>
-              <a:t>•  Публикация открытой методологии на SourceCraft</a:t>
+              <a:t>•  Публикация агентов и skill целиком в </a:t>
+            </a:r>
+            <a:r>
+              <a:rPr sz="1100" b="0" i="0" u="sng">
+                <a:solidFill>
+                  <a:srgbClr val="0B57D0"/>
+                </a:solidFill>
+                <a:latin typeface="YS Text"/>
+                <a:ea typeface="YS Text"/>
+                <a:hlinkClick r:id="rId2"/>
+              </a:rPr>
+              <a:t>github.com/Suprrllys/case-team</a:t>
+            </a:r>
+            <a:r>
+              <a:rPr sz="1100" b="0" i="0">
+                <a:solidFill>
+                  <a:srgbClr val="1A1A1A"/>
+                </a:solidFill>
+                <a:latin typeface="YS Text"/>
+                <a:ea typeface="YS Text"/>
+              </a:rPr>
+              <a:t> (сейчас опубликованы материалы заявки)</a:t>
             </a:r>
           </a:p>
           <a:p>
@@ -17410,7 +17494,28 @@
                 <a:latin typeface="YS Text"/>
                 <a:ea typeface="YS Text"/>
               </a:rPr>
-              <a:t>5 ролей · обучены на решениях для Axenix (Cup Moscow 2024) и Askona (Inno Case Hack 2025) · 26 методологических логик в каталоге команды.</a:t>
+              <a:t>5 ролей · обучены на решениях для Axenix (Cup Moscow 2024) и Askona (Inno Case Hack 2025) · 26 методологических логик — </a:t>
+            </a:r>
+            <a:r>
+              <a:rPr sz="1300" b="0" i="0" u="sng">
+                <a:solidFill>
+                  <a:srgbClr val="0B57D0"/>
+                </a:solidFill>
+                <a:latin typeface="YS Text"/>
+                <a:ea typeface="YS Text"/>
+                <a:hlinkClick r:id="rId2"/>
+              </a:rPr>
+              <a:t>открытый репозиторий</a:t>
+            </a:r>
+            <a:r>
+              <a:rPr sz="1300" b="0" i="0">
+                <a:solidFill>
+                  <a:srgbClr val="1A1A1A"/>
+                </a:solidFill>
+                <a:latin typeface="YS Text"/>
+                <a:ea typeface="YS Text"/>
+              </a:rPr>
+              <a:t>.</a:t>
             </a:r>
           </a:p>
         </p:txBody>
@@ -23248,7 +23353,28 @@
                 <a:latin typeface="YS Text"/>
                 <a:ea typeface="YS Text"/>
               </a:rPr>
-              <a:t>Решения для Axenix (Cup Moscow 2024) и Askona (Inno Case Hack 2025) → 26 методологических логик.</a:t>
+              <a:t>Решения для Axenix (Cup Moscow 2024) и Askona (Inno Case Hack 2025) → 26 методологических логик в </a:t>
+            </a:r>
+            <a:r>
+              <a:rPr sz="900" b="0" i="0" u="sng">
+                <a:solidFill>
+                  <a:srgbClr val="0B57D0"/>
+                </a:solidFill>
+                <a:latin typeface="YS Text"/>
+                <a:ea typeface="YS Text"/>
+                <a:hlinkClick r:id="rId2"/>
+              </a:rPr>
+              <a:t>открытом репозитории</a:t>
+            </a:r>
+            <a:r>
+              <a:rPr sz="900" b="0" i="0">
+                <a:solidFill>
+                  <a:srgbClr val="BBBBBB"/>
+                </a:solidFill>
+                <a:latin typeface="YS Text"/>
+                <a:ea typeface="YS Text"/>
+              </a:rPr>
+              <a:t>.</a:t>
             </a:r>
           </a:p>
         </p:txBody>
@@ -25082,7 +25208,28 @@
                 <a:latin typeface="YS Text"/>
                 <a:ea typeface="YS Text"/>
               </a:rPr>
-              <a:t>Дотренировка — на решениях для Axenix (Cup Moscow 2024) и Askona (Inno Case Hack 2025) с кейс-чемпионатов. Извлечено 26 методологических логик — разбор каждой откроем в репозитории после конкурса.</a:t>
+              <a:t>Дотренировка — на решениях для Axenix (Cup Moscow 2024) и Askona (Inno Case Hack 2025) с кейс-чемпионатов. Извлечено 26 методологических логик — материалы в </a:t>
+            </a:r>
+            <a:r>
+              <a:rPr sz="1100" b="0" i="0" u="sng">
+                <a:solidFill>
+                  <a:srgbClr val="0B57D0"/>
+                </a:solidFill>
+                <a:latin typeface="YS Text"/>
+                <a:ea typeface="YS Text"/>
+                <a:hlinkClick r:id="rId2"/>
+              </a:rPr>
+              <a:t>открытом репозитории github.com/Suprrllys/case-team</a:t>
+            </a:r>
+            <a:r>
+              <a:rPr sz="1100" b="0" i="0">
+                <a:solidFill>
+                  <a:srgbClr val="666666"/>
+                </a:solidFill>
+                <a:latin typeface="YS Text"/>
+                <a:ea typeface="YS Text"/>
+              </a:rPr>
+              <a:t>.</a:t>
             </a:r>
           </a:p>
         </p:txBody>
@@ -30510,7 +30657,18 @@
                 <a:latin typeface="YS Text"/>
                 <a:ea typeface="YS Text"/>
               </a:rPr>
-              <a:t>SourceCraft-репозиторий: публикация после конкурса</a:t>
+              <a:t>GitHub: </a:t>
+            </a:r>
+            <a:r>
+              <a:rPr sz="1100" b="0" i="0" u="sng">
+                <a:solidFill>
+                  <a:srgbClr val="0B57D0"/>
+                </a:solidFill>
+                <a:latin typeface="YS Text"/>
+                <a:ea typeface="YS Text"/>
+                <a:hlinkClick r:id="rId2"/>
+              </a:rPr>
+              <a:t>github.com/Suprrllys/case-team</a:t>
             </a:r>
           </a:p>
         </p:txBody>
